--- a/paper/ispcs2026-tgpio-slides.pptx
+++ b/paper/ispcs2026-tgpio-slides.pptx
@@ -5976,7 +5976,7 @@
                 </a:solidFill>
                 <a:latin typeface="Consolas"/>
               </a:rPr>
-              <a:t>Ahmad Byagowi  ·  byagowi@turbalance.com  ·  github.com/ahmadexp/TGPIO</a:t>
+              <a:t>Ahmad Byagowi  ·  ahmadexp@gmail.com  ·  github.com/ahmadexp/TGPIO</a:t>
             </a:r>
           </a:p>
         </p:txBody>
